--- a/m9/diapositivos/sessao-03-m9-f03.pptx
+++ b/m9/diapositivos/sessao-03-m9-f03.pptx
@@ -2598,7 +2598,177 @@
                 <a:ea typeface="Georgia" pitchFamily="34" charset="-122"/>
                 <a:cs typeface="Georgia" pitchFamily="34" charset="-120"/>
               </a:rPr>
-              <a:t>Em Saramago, as falas não levam travessão nem aspas: separam-se por vírgulas e a fala seguinte começa por maiúscula. Frases longas, tom oralizante (como quem conta em voz alta), ironia, provérbios e expressões populares, intertextualidade (outros textos e autores), e um narrador que comenta e salta no tempo.</a:t>
+              <a:t>Em Saramago, as falas </a:t>
+            </a:r>
+            <a:pPr indent="0" marL="0">
+              <a:lnSpc>
+                <a:spcPct val="120000"/>
+              </a:lnSpc>
+              <a:buNone/>
+            </a:pPr>
+            <a:r>
+              <a:rPr lang="en-US" sz="2300" b="1" dirty="0">
+                <a:solidFill>
+                  <a:srgbClr val="F2F0EA"/>
+                </a:solidFill>
+                <a:latin typeface="Georgia" pitchFamily="34" charset="0"/>
+                <a:ea typeface="Georgia" pitchFamily="34" charset="-122"/>
+                <a:cs typeface="Georgia" pitchFamily="34" charset="-120"/>
+              </a:rPr>
+              <a:t>não levam travessão nem aspas</a:t>
+            </a:r>
+            <a:pPr indent="0" marL="0">
+              <a:lnSpc>
+                <a:spcPct val="120000"/>
+              </a:lnSpc>
+              <a:buNone/>
+            </a:pPr>
+            <a:r>
+              <a:rPr lang="en-US" sz="2300" dirty="0">
+                <a:solidFill>
+                  <a:srgbClr val="F2F0EA"/>
+                </a:solidFill>
+                <a:latin typeface="Georgia" pitchFamily="34" charset="0"/>
+                <a:ea typeface="Georgia" pitchFamily="34" charset="-122"/>
+                <a:cs typeface="Georgia" pitchFamily="34" charset="-120"/>
+              </a:rPr>
+              <a:t>: separam-se por vírgulas e a fala seguinte começa por </a:t>
+            </a:r>
+            <a:pPr indent="0" marL="0">
+              <a:lnSpc>
+                <a:spcPct val="120000"/>
+              </a:lnSpc>
+              <a:buNone/>
+            </a:pPr>
+            <a:r>
+              <a:rPr lang="en-US" sz="2300" b="1" dirty="0">
+                <a:solidFill>
+                  <a:srgbClr val="F2F0EA"/>
+                </a:solidFill>
+                <a:latin typeface="Georgia" pitchFamily="34" charset="0"/>
+                <a:ea typeface="Georgia" pitchFamily="34" charset="-122"/>
+                <a:cs typeface="Georgia" pitchFamily="34" charset="-120"/>
+              </a:rPr>
+              <a:t>maiúscula</a:t>
+            </a:r>
+            <a:pPr indent="0" marL="0">
+              <a:lnSpc>
+                <a:spcPct val="120000"/>
+              </a:lnSpc>
+              <a:buNone/>
+            </a:pPr>
+            <a:r>
+              <a:rPr lang="en-US" sz="2300" dirty="0">
+                <a:solidFill>
+                  <a:srgbClr val="F2F0EA"/>
+                </a:solidFill>
+                <a:latin typeface="Georgia" pitchFamily="34" charset="0"/>
+                <a:ea typeface="Georgia" pitchFamily="34" charset="-122"/>
+                <a:cs typeface="Georgia" pitchFamily="34" charset="-120"/>
+              </a:rPr>
+              <a:t>. Frases longas, </a:t>
+            </a:r>
+            <a:pPr indent="0" marL="0">
+              <a:lnSpc>
+                <a:spcPct val="120000"/>
+              </a:lnSpc>
+              <a:buNone/>
+            </a:pPr>
+            <a:r>
+              <a:rPr lang="en-US" sz="2300" b="1" dirty="0">
+                <a:solidFill>
+                  <a:srgbClr val="F2F0EA"/>
+                </a:solidFill>
+                <a:latin typeface="Georgia" pitchFamily="34" charset="0"/>
+                <a:ea typeface="Georgia" pitchFamily="34" charset="-122"/>
+                <a:cs typeface="Georgia" pitchFamily="34" charset="-120"/>
+              </a:rPr>
+              <a:t>tom oralizante</a:t>
+            </a:r>
+            <a:pPr indent="0" marL="0">
+              <a:lnSpc>
+                <a:spcPct val="120000"/>
+              </a:lnSpc>
+              <a:buNone/>
+            </a:pPr>
+            <a:r>
+              <a:rPr lang="en-US" sz="2300" dirty="0">
+                <a:solidFill>
+                  <a:srgbClr val="F2F0EA"/>
+                </a:solidFill>
+                <a:latin typeface="Georgia" pitchFamily="34" charset="0"/>
+                <a:ea typeface="Georgia" pitchFamily="34" charset="-122"/>
+                <a:cs typeface="Georgia" pitchFamily="34" charset="-120"/>
+              </a:rPr>
+              <a:t> (como quem conta em voz alta), </a:t>
+            </a:r>
+            <a:pPr indent="0" marL="0">
+              <a:lnSpc>
+                <a:spcPct val="120000"/>
+              </a:lnSpc>
+              <a:buNone/>
+            </a:pPr>
+            <a:r>
+              <a:rPr lang="en-US" sz="2300" b="1" dirty="0">
+                <a:solidFill>
+                  <a:srgbClr val="F2F0EA"/>
+                </a:solidFill>
+                <a:latin typeface="Georgia" pitchFamily="34" charset="0"/>
+                <a:ea typeface="Georgia" pitchFamily="34" charset="-122"/>
+                <a:cs typeface="Georgia" pitchFamily="34" charset="-120"/>
+              </a:rPr>
+              <a:t>ironia</a:t>
+            </a:r>
+            <a:pPr indent="0" marL="0">
+              <a:lnSpc>
+                <a:spcPct val="120000"/>
+              </a:lnSpc>
+              <a:buNone/>
+            </a:pPr>
+            <a:r>
+              <a:rPr lang="en-US" sz="2300" dirty="0">
+                <a:solidFill>
+                  <a:srgbClr val="F2F0EA"/>
+                </a:solidFill>
+                <a:latin typeface="Georgia" pitchFamily="34" charset="0"/>
+                <a:ea typeface="Georgia" pitchFamily="34" charset="-122"/>
+                <a:cs typeface="Georgia" pitchFamily="34" charset="-120"/>
+              </a:rPr>
+              <a:t>, provérbios e expressões populares, </a:t>
+            </a:r>
+            <a:pPr indent="0" marL="0">
+              <a:lnSpc>
+                <a:spcPct val="120000"/>
+              </a:lnSpc>
+              <a:buNone/>
+            </a:pPr>
+            <a:r>
+              <a:rPr lang="en-US" sz="2300" b="1" dirty="0">
+                <a:solidFill>
+                  <a:srgbClr val="F2F0EA"/>
+                </a:solidFill>
+                <a:latin typeface="Georgia" pitchFamily="34" charset="0"/>
+                <a:ea typeface="Georgia" pitchFamily="34" charset="-122"/>
+                <a:cs typeface="Georgia" pitchFamily="34" charset="-120"/>
+              </a:rPr>
+              <a:t>intertextualidade</a:t>
+            </a:r>
+            <a:pPr indent="0" marL="0">
+              <a:lnSpc>
+                <a:spcPct val="120000"/>
+              </a:lnSpc>
+              <a:buNone/>
+            </a:pPr>
+            <a:r>
+              <a:rPr lang="en-US" sz="2300" dirty="0">
+                <a:solidFill>
+                  <a:srgbClr val="F2F0EA"/>
+                </a:solidFill>
+                <a:latin typeface="Georgia" pitchFamily="34" charset="0"/>
+                <a:ea typeface="Georgia" pitchFamily="34" charset="-122"/>
+                <a:cs typeface="Georgia" pitchFamily="34" charset="-120"/>
+              </a:rPr>
+              <a:t> (outros textos e autores), e um narrador que comenta e salta no tempo.</a:t>
             </a:r>
             <a:endParaRPr lang="en-US" sz="2300" dirty="0"/>
           </a:p>
